--- a/Presentation_Gestionnaire_Vehicule.pptx
+++ b/Presentation_Gestionnaire_Vehicule.pptx
@@ -5,20 +5,20 @@
     <p:sldMasterId id="2147483648" r:id="rId1"/>
   </p:sldMasterIdLst>
   <p:sldIdLst>
-    <p:sldId id="256" r:id="rId7"/>
-    <p:sldId id="257" r:id="rId8"/>
-    <p:sldId id="258" r:id="rId9"/>
-    <p:sldId id="259" r:id="rId10"/>
-    <p:sldId id="260" r:id="rId11"/>
-    <p:sldId id="261" r:id="rId12"/>
-    <p:sldId id="262" r:id="rId13"/>
-    <p:sldId id="263" r:id="rId14"/>
-    <p:sldId id="264" r:id="rId15"/>
-    <p:sldId id="265" r:id="rId16"/>
-    <p:sldId id="266" r:id="rId17"/>
-    <p:sldId id="267" r:id="rId18"/>
+    <p:sldId id="256" r:id="rId2"/>
+    <p:sldId id="257" r:id="rId3"/>
+    <p:sldId id="258" r:id="rId4"/>
+    <p:sldId id="259" r:id="rId5"/>
+    <p:sldId id="260" r:id="rId6"/>
+    <p:sldId id="261" r:id="rId7"/>
+    <p:sldId id="262" r:id="rId8"/>
+    <p:sldId id="263" r:id="rId9"/>
+    <p:sldId id="264" r:id="rId10"/>
+    <p:sldId id="265" r:id="rId11"/>
+    <p:sldId id="266" r:id="rId12"/>
+    <p:sldId id="267" r:id="rId13"/>
   </p:sldIdLst>
-  <p:sldSz cx="12188952" cy="6858000" type="screen4x3"/>
+  <p:sldSz cx="12188825" cy="6858000"/>
   <p:notesSz cx="6858000" cy="9144000"/>
   <p:defaultTextStyle>
     <a:defPPr>
@@ -115,6 +115,22 @@
       </a:defRPr>
     </a:lvl9pPr>
   </p:defaultTextStyle>
+  <p:extLst>
+    <p:ext uri="{EFAFB233-063F-42B5-8137-9DF3F51BA10A}">
+      <p15:sldGuideLst xmlns:p15="http://schemas.microsoft.com/office/powerpoint/2012/main">
+        <p15:guide id="1" orient="horz" pos="2160">
+          <p15:clr>
+            <a:srgbClr val="A4A3A4"/>
+          </p15:clr>
+        </p15:guide>
+        <p15:guide id="2" pos="2880">
+          <p15:clr>
+            <a:srgbClr val="A4A3A4"/>
+          </p15:clr>
+        </p15:guide>
+      </p15:sldGuideLst>
+    </p:ext>
+  </p:extLst>
 </p:presentation>
 </file>
 
@@ -156,10 +172,9 @@
           <a:lstStyle/>
           <a:p>
             <a:r>
-              <a:rPr lang="en-US" smtClean="0"/>
+              <a:rPr lang="en-US"/>
               <a:t>Click to edit Master title style</a:t>
             </a:r>
-            <a:endParaRPr lang="en-US"/>
           </a:p>
         </p:txBody>
       </p:sp>
@@ -275,10 +290,9 @@
           </a:lstStyle>
           <a:p>
             <a:r>
-              <a:rPr lang="en-US" smtClean="0"/>
+              <a:rPr lang="en-US"/>
               <a:t>Click to edit Master subtitle style</a:t>
             </a:r>
-            <a:endParaRPr lang="en-US"/>
           </a:p>
         </p:txBody>
       </p:sp>
@@ -299,7 +313,7 @@
           <a:p>
             <a:fld id="{5BCAD085-E8A6-8845-BD4E-CB4CCA059FC4}" type="datetimeFigureOut">
               <a:rPr lang="en-US" smtClean="0"/>
-              <a:t>1/27/13</a:t>
+              <a:t>5/13/2026</a:t>
             </a:fld>
             <a:endParaRPr lang="en-US"/>
           </a:p>
@@ -341,7 +355,7 @@
           <a:p>
             <a:fld id="{C1FF6DA9-008F-8B48-92A6-B652298478BF}" type="slidenum">
               <a:rPr lang="en-US" smtClean="0"/>
-              <a:t>‹#›</a:t>
+              <a:t>‹N°›</a:t>
             </a:fld>
             <a:endParaRPr lang="en-US"/>
           </a:p>
@@ -393,10 +407,9 @@
           <a:lstStyle/>
           <a:p>
             <a:r>
-              <a:rPr lang="en-US" smtClean="0"/>
+              <a:rPr lang="en-US"/>
               <a:t>Click to edit Master title style</a:t>
             </a:r>
-            <a:endParaRPr lang="en-US"/>
           </a:p>
         </p:txBody>
       </p:sp>
@@ -417,38 +430,37 @@
           <a:p>
             <a:pPr lvl="0"/>
             <a:r>
-              <a:rPr lang="en-US" smtClean="0"/>
+              <a:rPr lang="en-US"/>
               <a:t>Click to edit Master text styles</a:t>
             </a:r>
           </a:p>
           <a:p>
             <a:pPr lvl="1"/>
             <a:r>
-              <a:rPr lang="en-US" smtClean="0"/>
+              <a:rPr lang="en-US"/>
               <a:t>Second level</a:t>
             </a:r>
           </a:p>
           <a:p>
             <a:pPr lvl="2"/>
             <a:r>
-              <a:rPr lang="en-US" smtClean="0"/>
+              <a:rPr lang="en-US"/>
               <a:t>Third level</a:t>
             </a:r>
           </a:p>
           <a:p>
             <a:pPr lvl="3"/>
             <a:r>
-              <a:rPr lang="en-US" smtClean="0"/>
+              <a:rPr lang="en-US"/>
               <a:t>Fourth level</a:t>
             </a:r>
           </a:p>
           <a:p>
             <a:pPr lvl="4"/>
             <a:r>
-              <a:rPr lang="en-US" smtClean="0"/>
+              <a:rPr lang="en-US"/>
               <a:t>Fifth level</a:t>
             </a:r>
-            <a:endParaRPr lang="en-US"/>
           </a:p>
         </p:txBody>
       </p:sp>
@@ -469,7 +481,7 @@
           <a:p>
             <a:fld id="{5BCAD085-E8A6-8845-BD4E-CB4CCA059FC4}" type="datetimeFigureOut">
               <a:rPr lang="en-US" smtClean="0"/>
-              <a:t>1/27/13</a:t>
+              <a:t>5/13/2026</a:t>
             </a:fld>
             <a:endParaRPr lang="en-US"/>
           </a:p>
@@ -511,7 +523,7 @@
           <a:p>
             <a:fld id="{C1FF6DA9-008F-8B48-92A6-B652298478BF}" type="slidenum">
               <a:rPr lang="en-US" smtClean="0"/>
-              <a:t>‹#›</a:t>
+              <a:t>‹N°›</a:t>
             </a:fld>
             <a:endParaRPr lang="en-US"/>
           </a:p>
@@ -568,10 +580,9 @@
           <a:lstStyle/>
           <a:p>
             <a:r>
-              <a:rPr lang="en-US" smtClean="0"/>
+              <a:rPr lang="en-US"/>
               <a:t>Click to edit Master title style</a:t>
             </a:r>
-            <a:endParaRPr lang="en-US"/>
           </a:p>
         </p:txBody>
       </p:sp>
@@ -597,38 +608,37 @@
           <a:p>
             <a:pPr lvl="0"/>
             <a:r>
-              <a:rPr lang="en-US" smtClean="0"/>
+              <a:rPr lang="en-US"/>
               <a:t>Click to edit Master text styles</a:t>
             </a:r>
           </a:p>
           <a:p>
             <a:pPr lvl="1"/>
             <a:r>
-              <a:rPr lang="en-US" smtClean="0"/>
+              <a:rPr lang="en-US"/>
               <a:t>Second level</a:t>
             </a:r>
           </a:p>
           <a:p>
             <a:pPr lvl="2"/>
             <a:r>
-              <a:rPr lang="en-US" smtClean="0"/>
+              <a:rPr lang="en-US"/>
               <a:t>Third level</a:t>
             </a:r>
           </a:p>
           <a:p>
             <a:pPr lvl="3"/>
             <a:r>
-              <a:rPr lang="en-US" smtClean="0"/>
+              <a:rPr lang="en-US"/>
               <a:t>Fourth level</a:t>
             </a:r>
           </a:p>
           <a:p>
             <a:pPr lvl="4"/>
             <a:r>
-              <a:rPr lang="en-US" smtClean="0"/>
+              <a:rPr lang="en-US"/>
               <a:t>Fifth level</a:t>
             </a:r>
-            <a:endParaRPr lang="en-US"/>
           </a:p>
         </p:txBody>
       </p:sp>
@@ -649,7 +659,7 @@
           <a:p>
             <a:fld id="{5BCAD085-E8A6-8845-BD4E-CB4CCA059FC4}" type="datetimeFigureOut">
               <a:rPr lang="en-US" smtClean="0"/>
-              <a:t>1/27/13</a:t>
+              <a:t>5/13/2026</a:t>
             </a:fld>
             <a:endParaRPr lang="en-US"/>
           </a:p>
@@ -691,7 +701,7 @@
           <a:p>
             <a:fld id="{C1FF6DA9-008F-8B48-92A6-B652298478BF}" type="slidenum">
               <a:rPr lang="en-US" smtClean="0"/>
-              <a:t>‹#›</a:t>
+              <a:t>‹N°›</a:t>
             </a:fld>
             <a:endParaRPr lang="en-US"/>
           </a:p>
@@ -743,10 +753,9 @@
           <a:lstStyle/>
           <a:p>
             <a:r>
-              <a:rPr lang="en-US" smtClean="0"/>
+              <a:rPr lang="en-US"/>
               <a:t>Click to edit Master title style</a:t>
             </a:r>
-            <a:endParaRPr lang="en-US"/>
           </a:p>
         </p:txBody>
       </p:sp>
@@ -767,38 +776,37 @@
           <a:p>
             <a:pPr lvl="0"/>
             <a:r>
-              <a:rPr lang="en-US" smtClean="0"/>
+              <a:rPr lang="en-US"/>
               <a:t>Click to edit Master text styles</a:t>
             </a:r>
           </a:p>
           <a:p>
             <a:pPr lvl="1"/>
             <a:r>
-              <a:rPr lang="en-US" smtClean="0"/>
+              <a:rPr lang="en-US"/>
               <a:t>Second level</a:t>
             </a:r>
           </a:p>
           <a:p>
             <a:pPr lvl="2"/>
             <a:r>
-              <a:rPr lang="en-US" smtClean="0"/>
+              <a:rPr lang="en-US"/>
               <a:t>Third level</a:t>
             </a:r>
           </a:p>
           <a:p>
             <a:pPr lvl="3"/>
             <a:r>
-              <a:rPr lang="en-US" smtClean="0"/>
+              <a:rPr lang="en-US"/>
               <a:t>Fourth level</a:t>
             </a:r>
           </a:p>
           <a:p>
             <a:pPr lvl="4"/>
             <a:r>
-              <a:rPr lang="en-US" smtClean="0"/>
+              <a:rPr lang="en-US"/>
               <a:t>Fifth level</a:t>
             </a:r>
-            <a:endParaRPr lang="en-US"/>
           </a:p>
         </p:txBody>
       </p:sp>
@@ -819,7 +827,7 @@
           <a:p>
             <a:fld id="{5BCAD085-E8A6-8845-BD4E-CB4CCA059FC4}" type="datetimeFigureOut">
               <a:rPr lang="en-US" smtClean="0"/>
-              <a:t>1/27/13</a:t>
+              <a:t>5/13/2026</a:t>
             </a:fld>
             <a:endParaRPr lang="en-US"/>
           </a:p>
@@ -861,7 +869,7 @@
           <a:p>
             <a:fld id="{C1FF6DA9-008F-8B48-92A6-B652298478BF}" type="slidenum">
               <a:rPr lang="en-US" smtClean="0"/>
-              <a:t>‹#›</a:t>
+              <a:t>‹N°›</a:t>
             </a:fld>
             <a:endParaRPr lang="en-US"/>
           </a:p>
@@ -922,10 +930,9 @@
           </a:lstStyle>
           <a:p>
             <a:r>
-              <a:rPr lang="en-US" smtClean="0"/>
+              <a:rPr lang="en-US"/>
               <a:t>Click to edit Master title style</a:t>
             </a:r>
-            <a:endParaRPr lang="en-US"/>
           </a:p>
         </p:txBody>
       </p:sp>
@@ -1042,7 +1049,7 @@
           <a:p>
             <a:pPr lvl="0"/>
             <a:r>
-              <a:rPr lang="en-US" smtClean="0"/>
+              <a:rPr lang="en-US"/>
               <a:t>Click to edit Master text styles</a:t>
             </a:r>
           </a:p>
@@ -1065,7 +1072,7 @@
           <a:p>
             <a:fld id="{5BCAD085-E8A6-8845-BD4E-CB4CCA059FC4}" type="datetimeFigureOut">
               <a:rPr lang="en-US" smtClean="0"/>
-              <a:t>1/27/13</a:t>
+              <a:t>5/13/2026</a:t>
             </a:fld>
             <a:endParaRPr lang="en-US"/>
           </a:p>
@@ -1107,7 +1114,7 @@
           <a:p>
             <a:fld id="{C1FF6DA9-008F-8B48-92A6-B652298478BF}" type="slidenum">
               <a:rPr lang="en-US" smtClean="0"/>
-              <a:t>‹#›</a:t>
+              <a:t>‹N°›</a:t>
             </a:fld>
             <a:endParaRPr lang="en-US"/>
           </a:p>
@@ -1159,10 +1166,9 @@
           <a:lstStyle/>
           <a:p>
             <a:r>
-              <a:rPr lang="en-US" smtClean="0"/>
+              <a:rPr lang="en-US"/>
               <a:t>Click to edit Master title style</a:t>
             </a:r>
-            <a:endParaRPr lang="en-US"/>
           </a:p>
         </p:txBody>
       </p:sp>
@@ -1216,38 +1222,37 @@
           <a:p>
             <a:pPr lvl="0"/>
             <a:r>
-              <a:rPr lang="en-US" smtClean="0"/>
+              <a:rPr lang="en-US"/>
               <a:t>Click to edit Master text styles</a:t>
             </a:r>
           </a:p>
           <a:p>
             <a:pPr lvl="1"/>
             <a:r>
-              <a:rPr lang="en-US" smtClean="0"/>
+              <a:rPr lang="en-US"/>
               <a:t>Second level</a:t>
             </a:r>
           </a:p>
           <a:p>
             <a:pPr lvl="2"/>
             <a:r>
-              <a:rPr lang="en-US" smtClean="0"/>
+              <a:rPr lang="en-US"/>
               <a:t>Third level</a:t>
             </a:r>
           </a:p>
           <a:p>
             <a:pPr lvl="3"/>
             <a:r>
-              <a:rPr lang="en-US" smtClean="0"/>
+              <a:rPr lang="en-US"/>
               <a:t>Fourth level</a:t>
             </a:r>
           </a:p>
           <a:p>
             <a:pPr lvl="4"/>
             <a:r>
-              <a:rPr lang="en-US" smtClean="0"/>
+              <a:rPr lang="en-US"/>
               <a:t>Fifth level</a:t>
             </a:r>
-            <a:endParaRPr lang="en-US"/>
           </a:p>
         </p:txBody>
       </p:sp>
@@ -1301,38 +1306,37 @@
           <a:p>
             <a:pPr lvl="0"/>
             <a:r>
-              <a:rPr lang="en-US" smtClean="0"/>
+              <a:rPr lang="en-US"/>
               <a:t>Click to edit Master text styles</a:t>
             </a:r>
           </a:p>
           <a:p>
             <a:pPr lvl="1"/>
             <a:r>
-              <a:rPr lang="en-US" smtClean="0"/>
+              <a:rPr lang="en-US"/>
               <a:t>Second level</a:t>
             </a:r>
           </a:p>
           <a:p>
             <a:pPr lvl="2"/>
             <a:r>
-              <a:rPr lang="en-US" smtClean="0"/>
+              <a:rPr lang="en-US"/>
               <a:t>Third level</a:t>
             </a:r>
           </a:p>
           <a:p>
             <a:pPr lvl="3"/>
             <a:r>
-              <a:rPr lang="en-US" smtClean="0"/>
+              <a:rPr lang="en-US"/>
               <a:t>Fourth level</a:t>
             </a:r>
           </a:p>
           <a:p>
             <a:pPr lvl="4"/>
             <a:r>
-              <a:rPr lang="en-US" smtClean="0"/>
+              <a:rPr lang="en-US"/>
               <a:t>Fifth level</a:t>
             </a:r>
-            <a:endParaRPr lang="en-US"/>
           </a:p>
         </p:txBody>
       </p:sp>
@@ -1353,7 +1357,7 @@
           <a:p>
             <a:fld id="{5BCAD085-E8A6-8845-BD4E-CB4CCA059FC4}" type="datetimeFigureOut">
               <a:rPr lang="en-US" smtClean="0"/>
-              <a:t>1/27/13</a:t>
+              <a:t>5/13/2026</a:t>
             </a:fld>
             <a:endParaRPr lang="en-US"/>
           </a:p>
@@ -1395,7 +1399,7 @@
           <a:p>
             <a:fld id="{C1FF6DA9-008F-8B48-92A6-B652298478BF}" type="slidenum">
               <a:rPr lang="en-US" smtClean="0"/>
-              <a:t>‹#›</a:t>
+              <a:t>‹N°›</a:t>
             </a:fld>
             <a:endParaRPr lang="en-US"/>
           </a:p>
@@ -1451,10 +1455,9 @@
           </a:lstStyle>
           <a:p>
             <a:r>
-              <a:rPr lang="en-US" smtClean="0"/>
+              <a:rPr lang="en-US"/>
               <a:t>Click to edit Master title style</a:t>
             </a:r>
-            <a:endParaRPr lang="en-US"/>
           </a:p>
         </p:txBody>
       </p:sp>
@@ -1517,7 +1520,7 @@
           <a:p>
             <a:pPr lvl="0"/>
             <a:r>
-              <a:rPr lang="en-US" smtClean="0"/>
+              <a:rPr lang="en-US"/>
               <a:t>Click to edit Master text styles</a:t>
             </a:r>
           </a:p>
@@ -1573,38 +1576,37 @@
           <a:p>
             <a:pPr lvl="0"/>
             <a:r>
-              <a:rPr lang="en-US" smtClean="0"/>
+              <a:rPr lang="en-US"/>
               <a:t>Click to edit Master text styles</a:t>
             </a:r>
           </a:p>
           <a:p>
             <a:pPr lvl="1"/>
             <a:r>
-              <a:rPr lang="en-US" smtClean="0"/>
+              <a:rPr lang="en-US"/>
               <a:t>Second level</a:t>
             </a:r>
           </a:p>
           <a:p>
             <a:pPr lvl="2"/>
             <a:r>
-              <a:rPr lang="en-US" smtClean="0"/>
+              <a:rPr lang="en-US"/>
               <a:t>Third level</a:t>
             </a:r>
           </a:p>
           <a:p>
             <a:pPr lvl="3"/>
             <a:r>
-              <a:rPr lang="en-US" smtClean="0"/>
+              <a:rPr lang="en-US"/>
               <a:t>Fourth level</a:t>
             </a:r>
           </a:p>
           <a:p>
             <a:pPr lvl="4"/>
             <a:r>
-              <a:rPr lang="en-US" smtClean="0"/>
+              <a:rPr lang="en-US"/>
               <a:t>Fifth level</a:t>
             </a:r>
-            <a:endParaRPr lang="en-US"/>
           </a:p>
         </p:txBody>
       </p:sp>
@@ -1667,7 +1669,7 @@
           <a:p>
             <a:pPr lvl="0"/>
             <a:r>
-              <a:rPr lang="en-US" smtClean="0"/>
+              <a:rPr lang="en-US"/>
               <a:t>Click to edit Master text styles</a:t>
             </a:r>
           </a:p>
@@ -1723,38 +1725,37 @@
           <a:p>
             <a:pPr lvl="0"/>
             <a:r>
-              <a:rPr lang="en-US" smtClean="0"/>
+              <a:rPr lang="en-US"/>
               <a:t>Click to edit Master text styles</a:t>
             </a:r>
           </a:p>
           <a:p>
             <a:pPr lvl="1"/>
             <a:r>
-              <a:rPr lang="en-US" smtClean="0"/>
+              <a:rPr lang="en-US"/>
               <a:t>Second level</a:t>
             </a:r>
           </a:p>
           <a:p>
             <a:pPr lvl="2"/>
             <a:r>
-              <a:rPr lang="en-US" smtClean="0"/>
+              <a:rPr lang="en-US"/>
               <a:t>Third level</a:t>
             </a:r>
           </a:p>
           <a:p>
             <a:pPr lvl="3"/>
             <a:r>
-              <a:rPr lang="en-US" smtClean="0"/>
+              <a:rPr lang="en-US"/>
               <a:t>Fourth level</a:t>
             </a:r>
           </a:p>
           <a:p>
             <a:pPr lvl="4"/>
             <a:r>
-              <a:rPr lang="en-US" smtClean="0"/>
+              <a:rPr lang="en-US"/>
               <a:t>Fifth level</a:t>
             </a:r>
-            <a:endParaRPr lang="en-US"/>
           </a:p>
         </p:txBody>
       </p:sp>
@@ -1775,7 +1776,7 @@
           <a:p>
             <a:fld id="{5BCAD085-E8A6-8845-BD4E-CB4CCA059FC4}" type="datetimeFigureOut">
               <a:rPr lang="en-US" smtClean="0"/>
-              <a:t>1/27/13</a:t>
+              <a:t>5/13/2026</a:t>
             </a:fld>
             <a:endParaRPr lang="en-US"/>
           </a:p>
@@ -1817,7 +1818,7 @@
           <a:p>
             <a:fld id="{C1FF6DA9-008F-8B48-92A6-B652298478BF}" type="slidenum">
               <a:rPr lang="en-US" smtClean="0"/>
-              <a:t>‹#›</a:t>
+              <a:t>‹N°›</a:t>
             </a:fld>
             <a:endParaRPr lang="en-US"/>
           </a:p>
@@ -1869,10 +1870,9 @@
           <a:lstStyle/>
           <a:p>
             <a:r>
-              <a:rPr lang="en-US" smtClean="0"/>
+              <a:rPr lang="en-US"/>
               <a:t>Click to edit Master title style</a:t>
             </a:r>
-            <a:endParaRPr lang="en-US"/>
           </a:p>
         </p:txBody>
       </p:sp>
@@ -1893,7 +1893,7 @@
           <a:p>
             <a:fld id="{5BCAD085-E8A6-8845-BD4E-CB4CCA059FC4}" type="datetimeFigureOut">
               <a:rPr lang="en-US" smtClean="0"/>
-              <a:t>1/27/13</a:t>
+              <a:t>5/13/2026</a:t>
             </a:fld>
             <a:endParaRPr lang="en-US"/>
           </a:p>
@@ -1935,7 +1935,7 @@
           <a:p>
             <a:fld id="{C1FF6DA9-008F-8B48-92A6-B652298478BF}" type="slidenum">
               <a:rPr lang="en-US" smtClean="0"/>
-              <a:t>‹#›</a:t>
+              <a:t>‹N°›</a:t>
             </a:fld>
             <a:endParaRPr lang="en-US"/>
           </a:p>
@@ -1988,7 +1988,7 @@
           <a:p>
             <a:fld id="{5BCAD085-E8A6-8845-BD4E-CB4CCA059FC4}" type="datetimeFigureOut">
               <a:rPr lang="en-US" smtClean="0"/>
-              <a:t>1/27/13</a:t>
+              <a:t>5/13/2026</a:t>
             </a:fld>
             <a:endParaRPr lang="en-US"/>
           </a:p>
@@ -2030,7 +2030,7 @@
           <a:p>
             <a:fld id="{C1FF6DA9-008F-8B48-92A6-B652298478BF}" type="slidenum">
               <a:rPr lang="en-US" smtClean="0"/>
-              <a:t>‹#›</a:t>
+              <a:t>‹N°›</a:t>
             </a:fld>
             <a:endParaRPr lang="en-US"/>
           </a:p>
@@ -2091,10 +2091,9 @@
           </a:lstStyle>
           <a:p>
             <a:r>
-              <a:rPr lang="en-US" smtClean="0"/>
+              <a:rPr lang="en-US"/>
               <a:t>Click to edit Master title style</a:t>
             </a:r>
-            <a:endParaRPr lang="en-US"/>
           </a:p>
         </p:txBody>
       </p:sp>
@@ -2148,38 +2147,37 @@
           <a:p>
             <a:pPr lvl="0"/>
             <a:r>
-              <a:rPr lang="en-US" smtClean="0"/>
+              <a:rPr lang="en-US"/>
               <a:t>Click to edit Master text styles</a:t>
             </a:r>
           </a:p>
           <a:p>
             <a:pPr lvl="1"/>
             <a:r>
-              <a:rPr lang="en-US" smtClean="0"/>
+              <a:rPr lang="en-US"/>
               <a:t>Second level</a:t>
             </a:r>
           </a:p>
           <a:p>
             <a:pPr lvl="2"/>
             <a:r>
-              <a:rPr lang="en-US" smtClean="0"/>
+              <a:rPr lang="en-US"/>
               <a:t>Third level</a:t>
             </a:r>
           </a:p>
           <a:p>
             <a:pPr lvl="3"/>
             <a:r>
-              <a:rPr lang="en-US" smtClean="0"/>
+              <a:rPr lang="en-US"/>
               <a:t>Fourth level</a:t>
             </a:r>
           </a:p>
           <a:p>
             <a:pPr lvl="4"/>
             <a:r>
-              <a:rPr lang="en-US" smtClean="0"/>
+              <a:rPr lang="en-US"/>
               <a:t>Fifth level</a:t>
             </a:r>
-            <a:endParaRPr lang="en-US"/>
           </a:p>
         </p:txBody>
       </p:sp>
@@ -2242,7 +2240,7 @@
           <a:p>
             <a:pPr lvl="0"/>
             <a:r>
-              <a:rPr lang="en-US" smtClean="0"/>
+              <a:rPr lang="en-US"/>
               <a:t>Click to edit Master text styles</a:t>
             </a:r>
           </a:p>
@@ -2265,7 +2263,7 @@
           <a:p>
             <a:fld id="{5BCAD085-E8A6-8845-BD4E-CB4CCA059FC4}" type="datetimeFigureOut">
               <a:rPr lang="en-US" smtClean="0"/>
-              <a:t>1/27/13</a:t>
+              <a:t>5/13/2026</a:t>
             </a:fld>
             <a:endParaRPr lang="en-US"/>
           </a:p>
@@ -2307,7 +2305,7 @@
           <a:p>
             <a:fld id="{C1FF6DA9-008F-8B48-92A6-B652298478BF}" type="slidenum">
               <a:rPr lang="en-US" smtClean="0"/>
-              <a:t>‹#›</a:t>
+              <a:t>‹N°›</a:t>
             </a:fld>
             <a:endParaRPr lang="en-US"/>
           </a:p>
@@ -2368,10 +2366,9 @@
           </a:lstStyle>
           <a:p>
             <a:r>
-              <a:rPr lang="en-US" smtClean="0"/>
+              <a:rPr lang="en-US"/>
               <a:t>Click to edit Master title style</a:t>
             </a:r>
-            <a:endParaRPr lang="en-US"/>
           </a:p>
         </p:txBody>
       </p:sp>
@@ -2495,7 +2492,7 @@
           <a:p>
             <a:pPr lvl="0"/>
             <a:r>
-              <a:rPr lang="en-US" smtClean="0"/>
+              <a:rPr lang="en-US"/>
               <a:t>Click to edit Master text styles</a:t>
             </a:r>
           </a:p>
@@ -2518,7 +2515,7 @@
           <a:p>
             <a:fld id="{5BCAD085-E8A6-8845-BD4E-CB4CCA059FC4}" type="datetimeFigureOut">
               <a:rPr lang="en-US" smtClean="0"/>
-              <a:t>1/27/13</a:t>
+              <a:t>5/13/2026</a:t>
             </a:fld>
             <a:endParaRPr lang="en-US"/>
           </a:p>
@@ -2560,7 +2557,7 @@
           <a:p>
             <a:fld id="{C1FF6DA9-008F-8B48-92A6-B652298478BF}" type="slidenum">
               <a:rPr lang="en-US" smtClean="0"/>
-              <a:t>‹#›</a:t>
+              <a:t>‹N°›</a:t>
             </a:fld>
             <a:endParaRPr lang="en-US"/>
           </a:p>
@@ -2627,10 +2624,9 @@
           <a:lstStyle/>
           <a:p>
             <a:r>
-              <a:rPr lang="en-US" smtClean="0"/>
+              <a:rPr lang="en-US"/>
               <a:t>Click to edit Master title style</a:t>
             </a:r>
-            <a:endParaRPr lang="en-US"/>
           </a:p>
         </p:txBody>
       </p:sp>
@@ -2661,38 +2657,37 @@
           <a:p>
             <a:pPr lvl="0"/>
             <a:r>
-              <a:rPr lang="en-US" smtClean="0"/>
+              <a:rPr lang="en-US"/>
               <a:t>Click to edit Master text styles</a:t>
             </a:r>
           </a:p>
           <a:p>
             <a:pPr lvl="1"/>
             <a:r>
-              <a:rPr lang="en-US" smtClean="0"/>
+              <a:rPr lang="en-US"/>
               <a:t>Second level</a:t>
             </a:r>
           </a:p>
           <a:p>
             <a:pPr lvl="2"/>
             <a:r>
-              <a:rPr lang="en-US" smtClean="0"/>
+              <a:rPr lang="en-US"/>
               <a:t>Third level</a:t>
             </a:r>
           </a:p>
           <a:p>
             <a:pPr lvl="3"/>
             <a:r>
-              <a:rPr lang="en-US" smtClean="0"/>
+              <a:rPr lang="en-US"/>
               <a:t>Fourth level</a:t>
             </a:r>
           </a:p>
           <a:p>
             <a:pPr lvl="4"/>
             <a:r>
-              <a:rPr lang="en-US" smtClean="0"/>
+              <a:rPr lang="en-US"/>
               <a:t>Fifth level</a:t>
             </a:r>
-            <a:endParaRPr lang="en-US"/>
           </a:p>
         </p:txBody>
       </p:sp>
@@ -2731,7 +2726,7 @@
           <a:p>
             <a:fld id="{5BCAD085-E8A6-8845-BD4E-CB4CCA059FC4}" type="datetimeFigureOut">
               <a:rPr lang="en-US" smtClean="0"/>
-              <a:t>1/27/13</a:t>
+              <a:t>5/13/2026</a:t>
             </a:fld>
             <a:endParaRPr lang="en-US"/>
           </a:p>
@@ -2809,7 +2804,7 @@
           <a:p>
             <a:fld id="{C1FF6DA9-008F-8B48-92A6-B652298478BF}" type="slidenum">
               <a:rPr lang="en-US" smtClean="0"/>
-              <a:t>‹#›</a:t>
+              <a:t>‹N°›</a:t>
             </a:fld>
             <a:endParaRPr lang="en-US"/>
           </a:p>
@@ -3090,7 +3085,7 @@
 </file>
 
 <file path=ppt/slides/slide1.xml><?xml version="1.0" encoding="utf-8"?>
-<p:sld xmlns:a="http://schemas.openxmlformats.org/drawingml/2006/main" xmlns:p="http://schemas.openxmlformats.org/presentationml/2006/main" xmlns:r="http://schemas.openxmlformats.org/officeDocument/2006/relationships">
+<p:sld xmlns:a="http://schemas.openxmlformats.org/drawingml/2006/main" xmlns:r="http://schemas.openxmlformats.org/officeDocument/2006/relationships" xmlns:p="http://schemas.openxmlformats.org/presentationml/2006/main">
   <p:cSld>
     <p:bg>
       <p:bgPr>
@@ -3106,7 +3101,14 @@
         <p:cNvGrpSpPr/>
         <p:nvPr/>
       </p:nvGrpSpPr>
-      <p:grpSpPr/>
+      <p:grpSpPr>
+        <a:xfrm>
+          <a:off x="0" y="0"/>
+          <a:ext cx="0" cy="0"/>
+          <a:chOff x="0" y="0"/>
+          <a:chExt cx="0" cy="0"/>
+        </a:xfrm>
+      </p:grpSpPr>
       <p:sp>
         <p:nvSpPr>
           <p:cNvPr id="2" name="Rectangle 1"/>
@@ -3147,6 +3149,7 @@
           <a:lstStyle/>
           <a:p>
             <a:pPr algn="ctr"/>
+            <a:endParaRPr/>
           </a:p>
         </p:txBody>
       </p:sp>
@@ -3258,6 +3261,7 @@
           <a:lstStyle/>
           <a:p>
             <a:pPr algn="ctr"/>
+            <a:endParaRPr/>
           </a:p>
         </p:txBody>
       </p:sp>
@@ -3335,6 +3339,7 @@
           <a:lstStyle/>
           <a:p>
             <a:pPr algn="ctr"/>
+            <a:endParaRPr/>
           </a:p>
         </p:txBody>
       </p:sp>
@@ -3347,7 +3352,7 @@
 </file>
 
 <file path=ppt/slides/slide10.xml><?xml version="1.0" encoding="utf-8"?>
-<p:sld xmlns:a="http://schemas.openxmlformats.org/drawingml/2006/main" xmlns:p="http://schemas.openxmlformats.org/presentationml/2006/main" xmlns:r="http://schemas.openxmlformats.org/officeDocument/2006/relationships">
+<p:sld xmlns:a="http://schemas.openxmlformats.org/drawingml/2006/main" xmlns:r="http://schemas.openxmlformats.org/officeDocument/2006/relationships" xmlns:p="http://schemas.openxmlformats.org/presentationml/2006/main">
   <p:cSld>
     <p:bg>
       <p:bgPr>
@@ -3363,7 +3368,14 @@
         <p:cNvGrpSpPr/>
         <p:nvPr/>
       </p:nvGrpSpPr>
-      <p:grpSpPr/>
+      <p:grpSpPr>
+        <a:xfrm>
+          <a:off x="0" y="0"/>
+          <a:ext cx="0" cy="0"/>
+          <a:chOff x="0" y="0"/>
+          <a:chExt cx="0" cy="0"/>
+        </a:xfrm>
+      </p:grpSpPr>
       <p:sp>
         <p:nvSpPr>
           <p:cNvPr id="2" name="Rectangle 1"/>
@@ -3404,6 +3416,7 @@
           <a:lstStyle/>
           <a:p>
             <a:pPr algn="ctr"/>
+            <a:endParaRPr/>
           </a:p>
         </p:txBody>
       </p:sp>
@@ -3483,6 +3496,7 @@
           <a:lstStyle/>
           <a:p>
             <a:pPr algn="ctr"/>
+            <a:endParaRPr/>
           </a:p>
         </p:txBody>
       </p:sp>
@@ -3526,6 +3540,7 @@
           <a:lstStyle/>
           <a:p>
             <a:pPr algn="ctr"/>
+            <a:endParaRPr/>
           </a:p>
         </p:txBody>
       </p:sp>
@@ -3661,6 +3676,7 @@
           <a:lstStyle/>
           <a:p>
             <a:pPr algn="ctr"/>
+            <a:endParaRPr/>
           </a:p>
         </p:txBody>
       </p:sp>
@@ -3704,6 +3720,7 @@
           <a:lstStyle/>
           <a:p>
             <a:pPr algn="ctr"/>
+            <a:endParaRPr/>
           </a:p>
         </p:txBody>
       </p:sp>
@@ -3839,6 +3856,7 @@
           <a:lstStyle/>
           <a:p>
             <a:pPr algn="ctr"/>
+            <a:endParaRPr/>
           </a:p>
         </p:txBody>
       </p:sp>
@@ -3882,6 +3900,7 @@
           <a:lstStyle/>
           <a:p>
             <a:pPr algn="ctr"/>
+            <a:endParaRPr/>
           </a:p>
         </p:txBody>
       </p:sp>
@@ -4017,6 +4036,7 @@
           <a:lstStyle/>
           <a:p>
             <a:pPr algn="ctr"/>
+            <a:endParaRPr/>
           </a:p>
         </p:txBody>
       </p:sp>
@@ -4060,6 +4080,7 @@
           <a:lstStyle/>
           <a:p>
             <a:pPr algn="ctr"/>
+            <a:endParaRPr/>
           </a:p>
         </p:txBody>
       </p:sp>
@@ -4240,6 +4261,7 @@
           <a:lstStyle/>
           <a:p>
             <a:pPr algn="ctr"/>
+            <a:endParaRPr/>
           </a:p>
         </p:txBody>
       </p:sp>
@@ -4319,6 +4341,7 @@
           <a:lstStyle/>
           <a:p>
             <a:pPr algn="ctr"/>
+            <a:endParaRPr/>
           </a:p>
         </p:txBody>
       </p:sp>
@@ -4398,6 +4421,7 @@
           <a:lstStyle/>
           <a:p>
             <a:pPr algn="ctr"/>
+            <a:endParaRPr/>
           </a:p>
         </p:txBody>
       </p:sp>
@@ -4477,6 +4501,7 @@
           <a:lstStyle/>
           <a:p>
             <a:pPr algn="ctr"/>
+            <a:endParaRPr/>
           </a:p>
         </p:txBody>
       </p:sp>
@@ -4556,6 +4581,7 @@
           <a:lstStyle/>
           <a:p>
             <a:pPr algn="ctr"/>
+            <a:endParaRPr/>
           </a:p>
         </p:txBody>
       </p:sp>
@@ -4633,6 +4659,7 @@
           <a:lstStyle/>
           <a:p>
             <a:pPr algn="ctr"/>
+            <a:endParaRPr/>
           </a:p>
         </p:txBody>
       </p:sp>
@@ -4679,7 +4706,7 @@
 </file>
 
 <file path=ppt/slides/slide11.xml><?xml version="1.0" encoding="utf-8"?>
-<p:sld xmlns:a="http://schemas.openxmlformats.org/drawingml/2006/main" xmlns:p="http://schemas.openxmlformats.org/presentationml/2006/main" xmlns:r="http://schemas.openxmlformats.org/officeDocument/2006/relationships">
+<p:sld xmlns:a="http://schemas.openxmlformats.org/drawingml/2006/main" xmlns:r="http://schemas.openxmlformats.org/officeDocument/2006/relationships" xmlns:p="http://schemas.openxmlformats.org/presentationml/2006/main">
   <p:cSld>
     <p:bg>
       <p:bgPr>
@@ -4695,7 +4722,14 @@
         <p:cNvGrpSpPr/>
         <p:nvPr/>
       </p:nvGrpSpPr>
-      <p:grpSpPr/>
+      <p:grpSpPr>
+        <a:xfrm>
+          <a:off x="0" y="0"/>
+          <a:ext cx="0" cy="0"/>
+          <a:chOff x="0" y="0"/>
+          <a:chExt cx="0" cy="0"/>
+        </a:xfrm>
+      </p:grpSpPr>
       <p:sp>
         <p:nvSpPr>
           <p:cNvPr id="2" name="Rectangle 1"/>
@@ -4736,6 +4770,7 @@
           <a:lstStyle/>
           <a:p>
             <a:pPr algn="ctr"/>
+            <a:endParaRPr/>
           </a:p>
         </p:txBody>
       </p:sp>
@@ -4815,6 +4850,7 @@
           <a:lstStyle/>
           <a:p>
             <a:pPr algn="ctr"/>
+            <a:endParaRPr/>
           </a:p>
         </p:txBody>
       </p:sp>
@@ -4858,6 +4894,7 @@
           <a:lstStyle/>
           <a:p>
             <a:pPr algn="ctr"/>
+            <a:endParaRPr/>
           </a:p>
         </p:txBody>
       </p:sp>
@@ -4972,6 +5009,7 @@
           <a:lstStyle/>
           <a:p>
             <a:pPr algn="ctr"/>
+            <a:endParaRPr/>
           </a:p>
         </p:txBody>
       </p:sp>
@@ -5015,6 +5053,7 @@
           <a:lstStyle/>
           <a:p>
             <a:pPr algn="ctr"/>
+            <a:endParaRPr/>
           </a:p>
         </p:txBody>
       </p:sp>
@@ -5129,6 +5168,7 @@
           <a:lstStyle/>
           <a:p>
             <a:pPr algn="ctr"/>
+            <a:endParaRPr/>
           </a:p>
         </p:txBody>
       </p:sp>
@@ -5172,6 +5212,7 @@
           <a:lstStyle/>
           <a:p>
             <a:pPr algn="ctr"/>
+            <a:endParaRPr/>
           </a:p>
         </p:txBody>
       </p:sp>
@@ -5217,8 +5258,8 @@
         </p:nvSpPr>
         <p:spPr>
           <a:xfrm>
-            <a:off x="621792" y="3355848"/>
-            <a:ext cx="5134356" cy="868680"/>
+            <a:off x="608076" y="3355848"/>
+            <a:ext cx="5134356" cy="261610"/>
           </a:xfrm>
           <a:prstGeom prst="rect">
             <a:avLst/>
@@ -5233,13 +5274,44 @@
           <a:p>
             <a:pPr algn="l"/>
             <a:r>
-              <a:rPr sz="1100" b="0" i="0">
+              <a:rPr sz="1100" b="0" i="0" dirty="0">
                 <a:solidFill>
                   <a:srgbClr val="2D2D2D"/>
                 </a:solidFill>
               </a:rPr>
-              <a:t>Assignable (assigner, desassigner, estDisponible)
-Maintenable (planifierMaintenance, signalerIncident, necessiteMaintenance)</a:t>
+              <a:t>Assignable (assigner, </a:t>
+            </a:r>
+            <a:r>
+              <a:rPr sz="1100" b="0" i="0" dirty="0" err="1">
+                <a:solidFill>
+                  <a:srgbClr val="2D2D2D"/>
+                </a:solidFill>
+              </a:rPr>
+              <a:t>desassigner</a:t>
+            </a:r>
+            <a:r>
+              <a:rPr sz="1100" b="0" i="0" dirty="0">
+                <a:solidFill>
+                  <a:srgbClr val="2D2D2D"/>
+                </a:solidFill>
+              </a:rPr>
+              <a:t>, </a:t>
+            </a:r>
+            <a:r>
+              <a:rPr sz="1100" b="0" i="0" dirty="0" err="1">
+                <a:solidFill>
+                  <a:srgbClr val="2D2D2D"/>
+                </a:solidFill>
+              </a:rPr>
+              <a:t>estDisponible</a:t>
+            </a:r>
+            <a:r>
+              <a:rPr sz="1100" b="0" i="0" dirty="0">
+                <a:solidFill>
+                  <a:srgbClr val="2D2D2D"/>
+                </a:solidFill>
+              </a:rPr>
+              <a:t>)</a:t>
             </a:r>
           </a:p>
         </p:txBody>
@@ -5286,6 +5358,7 @@
           <a:lstStyle/>
           <a:p>
             <a:pPr algn="ctr"/>
+            <a:endParaRPr/>
           </a:p>
         </p:txBody>
       </p:sp>
@@ -5329,6 +5402,7 @@
           <a:lstStyle/>
           <a:p>
             <a:pPr algn="ctr"/>
+            <a:endParaRPr/>
           </a:p>
         </p:txBody>
       </p:sp>
@@ -5443,6 +5517,7 @@
           <a:lstStyle/>
           <a:p>
             <a:pPr algn="ctr"/>
+            <a:endParaRPr/>
           </a:p>
         </p:txBody>
       </p:sp>
@@ -5486,6 +5561,7 @@
           <a:lstStyle/>
           <a:p>
             <a:pPr algn="ctr"/>
+            <a:endParaRPr/>
           </a:p>
         </p:txBody>
       </p:sp>
@@ -5600,6 +5676,7 @@
           <a:lstStyle/>
           <a:p>
             <a:pPr algn="ctr"/>
+            <a:endParaRPr/>
           </a:p>
         </p:txBody>
       </p:sp>
@@ -5643,6 +5720,7 @@
           <a:lstStyle/>
           <a:p>
             <a:pPr algn="ctr"/>
+            <a:endParaRPr/>
           </a:p>
         </p:txBody>
       </p:sp>
@@ -5755,6 +5833,7 @@
           <a:lstStyle/>
           <a:p>
             <a:pPr algn="ctr"/>
+            <a:endParaRPr/>
           </a:p>
         </p:txBody>
       </p:sp>
@@ -5801,7 +5880,7 @@
 </file>
 
 <file path=ppt/slides/slide12.xml><?xml version="1.0" encoding="utf-8"?>
-<p:sld xmlns:a="http://schemas.openxmlformats.org/drawingml/2006/main" xmlns:p="http://schemas.openxmlformats.org/presentationml/2006/main" xmlns:r="http://schemas.openxmlformats.org/officeDocument/2006/relationships">
+<p:sld xmlns:a="http://schemas.openxmlformats.org/drawingml/2006/main" xmlns:r="http://schemas.openxmlformats.org/officeDocument/2006/relationships" xmlns:p="http://schemas.openxmlformats.org/presentationml/2006/main">
   <p:cSld>
     <p:bg>
       <p:bgPr>
@@ -5817,7 +5896,14 @@
         <p:cNvGrpSpPr/>
         <p:nvPr/>
       </p:nvGrpSpPr>
-      <p:grpSpPr/>
+      <p:grpSpPr>
+        <a:xfrm>
+          <a:off x="0" y="0"/>
+          <a:ext cx="0" cy="0"/>
+          <a:chOff x="0" y="0"/>
+          <a:chExt cx="0" cy="0"/>
+        </a:xfrm>
+      </p:grpSpPr>
       <p:sp>
         <p:nvSpPr>
           <p:cNvPr id="2" name="Rectangle 1"/>
@@ -5858,6 +5944,7 @@
           <a:lstStyle/>
           <a:p>
             <a:pPr algn="ctr"/>
+            <a:endParaRPr/>
           </a:p>
         </p:txBody>
       </p:sp>
@@ -5935,6 +6022,7 @@
           <a:lstStyle/>
           <a:p>
             <a:pPr algn="ctr"/>
+            <a:endParaRPr/>
           </a:p>
         </p:txBody>
       </p:sp>
@@ -5978,6 +6066,7 @@
           <a:lstStyle/>
           <a:p>
             <a:pPr algn="ctr"/>
+            <a:endParaRPr/>
           </a:p>
         </p:txBody>
       </p:sp>
@@ -6055,6 +6144,7 @@
           <a:lstStyle/>
           <a:p>
             <a:pPr algn="ctr"/>
+            <a:endParaRPr/>
           </a:p>
         </p:txBody>
       </p:sp>
@@ -6132,6 +6222,7 @@
           <a:lstStyle/>
           <a:p>
             <a:pPr algn="ctr"/>
+            <a:endParaRPr/>
           </a:p>
         </p:txBody>
       </p:sp>
@@ -6209,6 +6300,7 @@
           <a:lstStyle/>
           <a:p>
             <a:pPr algn="ctr"/>
+            <a:endParaRPr/>
           </a:p>
         </p:txBody>
       </p:sp>
@@ -6323,7 +6415,7 @@
 </file>
 
 <file path=ppt/slides/slide2.xml><?xml version="1.0" encoding="utf-8"?>
-<p:sld xmlns:a="http://schemas.openxmlformats.org/drawingml/2006/main" xmlns:p="http://schemas.openxmlformats.org/presentationml/2006/main" xmlns:r="http://schemas.openxmlformats.org/officeDocument/2006/relationships">
+<p:sld xmlns:a="http://schemas.openxmlformats.org/drawingml/2006/main" xmlns:r="http://schemas.openxmlformats.org/officeDocument/2006/relationships" xmlns:p="http://schemas.openxmlformats.org/presentationml/2006/main">
   <p:cSld>
     <p:bg>
       <p:bgPr>
@@ -6339,7 +6431,14 @@
         <p:cNvGrpSpPr/>
         <p:nvPr/>
       </p:nvGrpSpPr>
-      <p:grpSpPr/>
+      <p:grpSpPr>
+        <a:xfrm>
+          <a:off x="0" y="0"/>
+          <a:ext cx="0" cy="0"/>
+          <a:chOff x="0" y="0"/>
+          <a:chExt cx="0" cy="0"/>
+        </a:xfrm>
+      </p:grpSpPr>
       <p:sp>
         <p:nvSpPr>
           <p:cNvPr id="2" name="Rectangle 1"/>
@@ -6380,6 +6479,7 @@
           <a:lstStyle/>
           <a:p>
             <a:pPr algn="ctr"/>
+            <a:endParaRPr/>
           </a:p>
         </p:txBody>
       </p:sp>
@@ -6459,6 +6559,7 @@
           <a:lstStyle/>
           <a:p>
             <a:pPr algn="ctr"/>
+            <a:endParaRPr/>
           </a:p>
         </p:txBody>
       </p:sp>
@@ -6572,6 +6673,7 @@
           <a:lstStyle/>
           <a:p>
             <a:pPr algn="ctr"/>
+            <a:endParaRPr/>
           </a:p>
         </p:txBody>
       </p:sp>
@@ -6685,6 +6787,7 @@
           <a:lstStyle/>
           <a:p>
             <a:pPr algn="ctr"/>
+            <a:endParaRPr/>
           </a:p>
         </p:txBody>
       </p:sp>
@@ -6798,6 +6901,7 @@
           <a:lstStyle/>
           <a:p>
             <a:pPr algn="ctr"/>
+            <a:endParaRPr/>
           </a:p>
         </p:txBody>
       </p:sp>
@@ -6911,6 +7015,7 @@
           <a:lstStyle/>
           <a:p>
             <a:pPr algn="ctr"/>
+            <a:endParaRPr/>
           </a:p>
         </p:txBody>
       </p:sp>
@@ -7024,6 +7129,7 @@
           <a:lstStyle/>
           <a:p>
             <a:pPr algn="ctr"/>
+            <a:endParaRPr/>
           </a:p>
         </p:txBody>
       </p:sp>
@@ -7135,6 +7241,7 @@
           <a:lstStyle/>
           <a:p>
             <a:pPr algn="ctr"/>
+            <a:endParaRPr/>
           </a:p>
         </p:txBody>
       </p:sp>
@@ -7181,7 +7288,7 @@
 </file>
 
 <file path=ppt/slides/slide3.xml><?xml version="1.0" encoding="utf-8"?>
-<p:sld xmlns:a="http://schemas.openxmlformats.org/drawingml/2006/main" xmlns:p="http://schemas.openxmlformats.org/presentationml/2006/main" xmlns:r="http://schemas.openxmlformats.org/officeDocument/2006/relationships">
+<p:sld xmlns:a="http://schemas.openxmlformats.org/drawingml/2006/main" xmlns:r="http://schemas.openxmlformats.org/officeDocument/2006/relationships" xmlns:p="http://schemas.openxmlformats.org/presentationml/2006/main">
   <p:cSld>
     <p:bg>
       <p:bgPr>
@@ -7197,7 +7304,14 @@
         <p:cNvGrpSpPr/>
         <p:nvPr/>
       </p:nvGrpSpPr>
-      <p:grpSpPr/>
+      <p:grpSpPr>
+        <a:xfrm>
+          <a:off x="0" y="0"/>
+          <a:ext cx="0" cy="0"/>
+          <a:chOff x="0" y="0"/>
+          <a:chExt cx="0" cy="0"/>
+        </a:xfrm>
+      </p:grpSpPr>
       <p:sp>
         <p:nvSpPr>
           <p:cNvPr id="2" name="Rectangle 1"/>
@@ -7238,6 +7352,7 @@
           <a:lstStyle/>
           <a:p>
             <a:pPr algn="ctr"/>
+            <a:endParaRPr/>
           </a:p>
         </p:txBody>
       </p:sp>
@@ -7349,6 +7464,7 @@
           <a:lstStyle/>
           <a:p>
             <a:pPr algn="ctr"/>
+            <a:endParaRPr/>
           </a:p>
         </p:txBody>
       </p:sp>
@@ -7392,6 +7508,7 @@
           <a:lstStyle/>
           <a:p>
             <a:pPr algn="ctr"/>
+            <a:endParaRPr/>
           </a:p>
         </p:txBody>
       </p:sp>
@@ -7469,6 +7586,7 @@
           <a:lstStyle/>
           <a:p>
             <a:pPr algn="ctr"/>
+            <a:endParaRPr/>
           </a:p>
         </p:txBody>
       </p:sp>
@@ -7546,6 +7664,7 @@
           <a:lstStyle/>
           <a:p>
             <a:pPr algn="ctr"/>
+            <a:endParaRPr/>
           </a:p>
         </p:txBody>
       </p:sp>
@@ -7657,6 +7776,7 @@
           <a:lstStyle/>
           <a:p>
             <a:pPr algn="ctr"/>
+            <a:endParaRPr/>
           </a:p>
         </p:txBody>
       </p:sp>
@@ -7700,6 +7820,7 @@
           <a:lstStyle/>
           <a:p>
             <a:pPr algn="ctr"/>
+            <a:endParaRPr/>
           </a:p>
         </p:txBody>
       </p:sp>
@@ -7726,7 +7847,7 @@
           <a:lstStyle/>
           <a:p>
             <a:r>
-              <a:rPr b="1" sz="1400">
+              <a:rPr sz="1400" b="1">
                 <a:solidFill>
                   <a:srgbClr val="1A375E"/>
                 </a:solidFill>
@@ -7784,6 +7905,7 @@
           <a:lstStyle/>
           <a:p>
             <a:pPr algn="ctr"/>
+            <a:endParaRPr/>
           </a:p>
         </p:txBody>
       </p:sp>
@@ -7810,7 +7932,7 @@
           <a:lstStyle/>
           <a:p>
             <a:r>
-              <a:rPr b="1" sz="1400">
+              <a:rPr sz="1400" b="1">
                 <a:solidFill>
                   <a:srgbClr val="1A375E"/>
                 </a:solidFill>
@@ -7868,6 +7990,7 @@
           <a:lstStyle/>
           <a:p>
             <a:pPr algn="ctr"/>
+            <a:endParaRPr/>
           </a:p>
         </p:txBody>
       </p:sp>
@@ -7894,7 +8017,7 @@
           <a:lstStyle/>
           <a:p>
             <a:r>
-              <a:rPr b="1" sz="1400">
+              <a:rPr sz="1400" b="1">
                 <a:solidFill>
                   <a:srgbClr val="1A375E"/>
                 </a:solidFill>
@@ -7952,6 +8075,7 @@
           <a:lstStyle/>
           <a:p>
             <a:pPr algn="ctr"/>
+            <a:endParaRPr/>
           </a:p>
         </p:txBody>
       </p:sp>
@@ -7978,7 +8102,7 @@
           <a:lstStyle/>
           <a:p>
             <a:r>
-              <a:rPr b="1" sz="1400">
+              <a:rPr sz="1400" b="1">
                 <a:solidFill>
                   <a:srgbClr val="1A375E"/>
                 </a:solidFill>
@@ -8036,6 +8160,7 @@
           <a:lstStyle/>
           <a:p>
             <a:pPr algn="ctr"/>
+            <a:endParaRPr/>
           </a:p>
         </p:txBody>
       </p:sp>
@@ -8062,7 +8187,7 @@
           <a:lstStyle/>
           <a:p>
             <a:r>
-              <a:rPr b="1" sz="1400">
+              <a:rPr sz="1400" b="1">
                 <a:solidFill>
                   <a:srgbClr val="1A375E"/>
                 </a:solidFill>
@@ -8120,6 +8245,7 @@
           <a:lstStyle/>
           <a:p>
             <a:pPr algn="ctr"/>
+            <a:endParaRPr/>
           </a:p>
         </p:txBody>
       </p:sp>
@@ -8166,7 +8292,7 @@
 </file>
 
 <file path=ppt/slides/slide4.xml><?xml version="1.0" encoding="utf-8"?>
-<p:sld xmlns:a="http://schemas.openxmlformats.org/drawingml/2006/main" xmlns:p="http://schemas.openxmlformats.org/presentationml/2006/main" xmlns:r="http://schemas.openxmlformats.org/officeDocument/2006/relationships">
+<p:sld xmlns:a="http://schemas.openxmlformats.org/drawingml/2006/main" xmlns:r="http://schemas.openxmlformats.org/officeDocument/2006/relationships" xmlns:p="http://schemas.openxmlformats.org/presentationml/2006/main">
   <p:cSld>
     <p:bg>
       <p:bgPr>
@@ -8182,7 +8308,14 @@
         <p:cNvGrpSpPr/>
         <p:nvPr/>
       </p:nvGrpSpPr>
-      <p:grpSpPr/>
+      <p:grpSpPr>
+        <a:xfrm>
+          <a:off x="0" y="0"/>
+          <a:ext cx="0" cy="0"/>
+          <a:chOff x="0" y="0"/>
+          <a:chExt cx="0" cy="0"/>
+        </a:xfrm>
+      </p:grpSpPr>
       <p:sp>
         <p:nvSpPr>
           <p:cNvPr id="2" name="Rectangle 1"/>
@@ -8223,6 +8356,7 @@
           <a:lstStyle/>
           <a:p>
             <a:pPr algn="ctr"/>
+            <a:endParaRPr/>
           </a:p>
         </p:txBody>
       </p:sp>
@@ -8300,6 +8434,7 @@
           <a:lstStyle/>
           <a:p>
             <a:pPr algn="ctr"/>
+            <a:endParaRPr/>
           </a:p>
         </p:txBody>
       </p:sp>
@@ -8412,6 +8547,7 @@
           <a:lstStyle/>
           <a:p>
             <a:pPr algn="ctr"/>
+            <a:endParaRPr/>
           </a:p>
         </p:txBody>
       </p:sp>
@@ -8524,6 +8660,7 @@
           <a:lstStyle/>
           <a:p>
             <a:pPr algn="ctr"/>
+            <a:endParaRPr/>
           </a:p>
         </p:txBody>
       </p:sp>
@@ -8673,6 +8810,7 @@
           <a:lstStyle/>
           <a:p>
             <a:pPr algn="ctr"/>
+            <a:endParaRPr/>
           </a:p>
         </p:txBody>
       </p:sp>
@@ -8700,7 +8838,7 @@
           <a:p>
             <a:pPr algn="l"/>
             <a:r>
-              <a:rPr sz="1200" b="0" i="1">
+              <a:rPr sz="1200" b="0" i="1" dirty="0">
                 <a:solidFill>
                   <a:srgbClr val="205C9E"/>
                 </a:solidFill>
@@ -8712,7 +8850,7 @@
       </p:sp>
       <p:sp>
         <p:nvSpPr>
-          <p:cNvPr id="16" name="Rectangle 15"/>
+          <p:cNvPr id="18" name="Rectangle 17"/>
           <p:cNvSpPr/>
           <p:nvPr/>
         </p:nvSpPr>
@@ -8752,18 +8890,19 @@
           <a:lstStyle/>
           <a:p>
             <a:pPr algn="ctr"/>
-          </a:p>
-        </p:txBody>
-      </p:sp>
-      <p:sp>
-        <p:nvSpPr>
-          <p:cNvPr id="17" name="TextBox 16"/>
+            <a:endParaRPr/>
+          </a:p>
+        </p:txBody>
+      </p:sp>
+      <p:sp>
+        <p:nvSpPr>
+          <p:cNvPr id="19" name="TextBox 18"/>
           <p:cNvSpPr txBox="1"/>
           <p:nvPr/>
         </p:nvSpPr>
         <p:spPr>
           <a:xfrm>
-            <a:off x="4023360" y="5614416"/>
+            <a:off x="3977640" y="5605272"/>
             <a:ext cx="1737360" cy="292608"/>
           </a:xfrm>
           <a:prstGeom prst="rect">
@@ -8779,86 +8918,7 @@
           <a:p>
             <a:pPr algn="l"/>
             <a:r>
-              <a:rPr sz="1200" b="0" i="1">
-                <a:solidFill>
-                  <a:srgbClr val="205C9E"/>
-                </a:solidFill>
-              </a:rPr>
-              <a:t>«interface»  Maintenable</a:t>
-            </a:r>
-          </a:p>
-        </p:txBody>
-      </p:sp>
-      <p:sp>
-        <p:nvSpPr>
-          <p:cNvPr id="18" name="Rectangle 17"/>
-          <p:cNvSpPr/>
-          <p:nvPr/>
-        </p:nvSpPr>
-        <p:spPr>
-          <a:xfrm>
-            <a:off x="5943600" y="5577840"/>
-            <a:ext cx="1828800" cy="347472"/>
-          </a:xfrm>
-          <a:prstGeom prst="rect">
-            <a:avLst/>
-          </a:prstGeom>
-          <a:solidFill>
-            <a:srgbClr val="D6E4F7"/>
-          </a:solidFill>
-          <a:ln w="12700">
-            <a:solidFill>
-              <a:srgbClr val="205C9E"/>
-            </a:solidFill>
-          </a:ln>
-        </p:spPr>
-        <p:style>
-          <a:lnRef idx="1">
-            <a:schemeClr val="accent1"/>
-          </a:lnRef>
-          <a:fillRef idx="3">
-            <a:schemeClr val="accent1"/>
-          </a:fillRef>
-          <a:effectRef idx="2">
-            <a:schemeClr val="accent1"/>
-          </a:effectRef>
-          <a:fontRef idx="minor">
-            <a:schemeClr val="lt1"/>
-          </a:fontRef>
-        </p:style>
-        <p:txBody>
-          <a:bodyPr rtlCol="0" anchor="ctr"/>
-          <a:lstStyle/>
-          <a:p>
-            <a:pPr algn="ctr"/>
-          </a:p>
-        </p:txBody>
-      </p:sp>
-      <p:sp>
-        <p:nvSpPr>
-          <p:cNvPr id="19" name="TextBox 18"/>
-          <p:cNvSpPr txBox="1"/>
-          <p:nvPr/>
-        </p:nvSpPr>
-        <p:spPr>
-          <a:xfrm>
-            <a:off x="6035040" y="5614416"/>
-            <a:ext cx="1737360" cy="292608"/>
-          </a:xfrm>
-          <a:prstGeom prst="rect">
-            <a:avLst/>
-          </a:prstGeom>
-          <a:noFill/>
-        </p:spPr>
-        <p:txBody>
-          <a:bodyPr wrap="square">
-            <a:spAutoFit/>
-          </a:bodyPr>
-          <a:lstStyle/>
-          <a:p>
-            <a:pPr algn="l"/>
-            <a:r>
-              <a:rPr sz="1200" b="0" i="1">
+              <a:rPr sz="1200" b="0" i="1" dirty="0">
                 <a:solidFill>
                   <a:srgbClr val="205C9E"/>
                 </a:solidFill>
@@ -8908,6 +8968,7 @@
           <a:lstStyle/>
           <a:p>
             <a:pPr algn="ctr"/>
+            <a:endParaRPr/>
           </a:p>
         </p:txBody>
       </p:sp>
@@ -8954,7 +9015,7 @@
 </file>
 
 <file path=ppt/slides/slide5.xml><?xml version="1.0" encoding="utf-8"?>
-<p:sld xmlns:a="http://schemas.openxmlformats.org/drawingml/2006/main" xmlns:p="http://schemas.openxmlformats.org/presentationml/2006/main" xmlns:r="http://schemas.openxmlformats.org/officeDocument/2006/relationships">
+<p:sld xmlns:a="http://schemas.openxmlformats.org/drawingml/2006/main" xmlns:r="http://schemas.openxmlformats.org/officeDocument/2006/relationships" xmlns:p="http://schemas.openxmlformats.org/presentationml/2006/main">
   <p:cSld>
     <p:bg>
       <p:bgPr>
@@ -8970,7 +9031,14 @@
         <p:cNvGrpSpPr/>
         <p:nvPr/>
       </p:nvGrpSpPr>
-      <p:grpSpPr/>
+      <p:grpSpPr>
+        <a:xfrm>
+          <a:off x="0" y="0"/>
+          <a:ext cx="0" cy="0"/>
+          <a:chOff x="0" y="0"/>
+          <a:chExt cx="0" cy="0"/>
+        </a:xfrm>
+      </p:grpSpPr>
       <p:sp>
         <p:nvSpPr>
           <p:cNvPr id="2" name="Rectangle 1"/>
@@ -9011,6 +9079,7 @@
           <a:lstStyle/>
           <a:p>
             <a:pPr algn="ctr"/>
+            <a:endParaRPr/>
           </a:p>
         </p:txBody>
       </p:sp>
@@ -9090,6 +9159,7 @@
           <a:lstStyle/>
           <a:p>
             <a:pPr algn="ctr"/>
+            <a:endParaRPr/>
           </a:p>
         </p:txBody>
       </p:sp>
@@ -9133,6 +9203,7 @@
           <a:lstStyle/>
           <a:p>
             <a:pPr algn="ctr"/>
+            <a:endParaRPr/>
           </a:p>
         </p:txBody>
       </p:sp>
@@ -9279,6 +9350,7 @@
           <a:lstStyle/>
           <a:p>
             <a:pPr algn="ctr"/>
+            <a:endParaRPr/>
           </a:p>
         </p:txBody>
       </p:sp>
@@ -9322,6 +9394,7 @@
           <a:lstStyle/>
           <a:p>
             <a:pPr algn="ctr"/>
+            <a:endParaRPr/>
           </a:p>
         </p:txBody>
       </p:sp>
@@ -9479,6 +9552,7 @@
           <a:lstStyle/>
           <a:p>
             <a:pPr algn="ctr"/>
+            <a:endParaRPr/>
           </a:p>
         </p:txBody>
       </p:sp>
@@ -9522,6 +9596,7 @@
           <a:lstStyle/>
           <a:p>
             <a:pPr algn="ctr"/>
+            <a:endParaRPr/>
           </a:p>
         </p:txBody>
       </p:sp>
@@ -9756,6 +9831,7 @@
           <a:lstStyle/>
           <a:p>
             <a:pPr algn="ctr"/>
+            <a:endParaRPr/>
           </a:p>
         </p:txBody>
       </p:sp>
@@ -9802,7 +9878,7 @@
 </file>
 
 <file path=ppt/slides/slide6.xml><?xml version="1.0" encoding="utf-8"?>
-<p:sld xmlns:a="http://schemas.openxmlformats.org/drawingml/2006/main" xmlns:p="http://schemas.openxmlformats.org/presentationml/2006/main" xmlns:r="http://schemas.openxmlformats.org/officeDocument/2006/relationships">
+<p:sld xmlns:a="http://schemas.openxmlformats.org/drawingml/2006/main" xmlns:r="http://schemas.openxmlformats.org/officeDocument/2006/relationships" xmlns:p="http://schemas.openxmlformats.org/presentationml/2006/main">
   <p:cSld>
     <p:bg>
       <p:bgPr>
@@ -9818,7 +9894,14 @@
         <p:cNvGrpSpPr/>
         <p:nvPr/>
       </p:nvGrpSpPr>
-      <p:grpSpPr/>
+      <p:grpSpPr>
+        <a:xfrm>
+          <a:off x="0" y="0"/>
+          <a:ext cx="0" cy="0"/>
+          <a:chOff x="0" y="0"/>
+          <a:chExt cx="0" cy="0"/>
+        </a:xfrm>
+      </p:grpSpPr>
       <p:sp>
         <p:nvSpPr>
           <p:cNvPr id="2" name="Rectangle 1"/>
@@ -9859,6 +9942,7 @@
           <a:lstStyle/>
           <a:p>
             <a:pPr algn="ctr"/>
+            <a:endParaRPr/>
           </a:p>
         </p:txBody>
       </p:sp>
@@ -9938,6 +10022,7 @@
           <a:lstStyle/>
           <a:p>
             <a:pPr algn="ctr"/>
+            <a:endParaRPr/>
           </a:p>
         </p:txBody>
       </p:sp>
@@ -9981,6 +10066,7 @@
           <a:lstStyle/>
           <a:p>
             <a:pPr algn="ctr"/>
+            <a:endParaRPr/>
           </a:p>
         </p:txBody>
       </p:sp>
@@ -10063,13 +10149,21 @@
           </a:p>
           <a:p>
             <a:pPr algn="l"/>
+            <a:endParaRPr sz="1200">
+              <a:solidFill>
+                <a:srgbClr val="2D2D2D"/>
+              </a:solidFill>
+            </a:endParaRPr>
+          </a:p>
+          <a:p>
+            <a:pPr algn="l"/>
             <a:r>
               <a:rPr sz="1200">
                 <a:solidFill>
                   <a:srgbClr val="2D2D2D"/>
                 </a:solidFill>
               </a:rPr>
-              <a:t/>
+              <a:t>Attribut supplémentaire :</a:t>
             </a:r>
           </a:p>
           <a:p>
@@ -10080,30 +10174,16 @@
                   <a:srgbClr val="2D2D2D"/>
                 </a:solidFill>
               </a:rPr>
-              <a:t>Attribut supplémentaire :</a:t>
-            </a:r>
-          </a:p>
-          <a:p>
-            <a:pPr algn="l"/>
-            <a:r>
-              <a:rPr sz="1200">
-                <a:solidFill>
-                  <a:srgbClr val="2D2D2D"/>
-                </a:solidFill>
-              </a:rPr>
               <a:t>  • capaciteTonnage (double)</a:t>
             </a:r>
           </a:p>
           <a:p>
             <a:pPr algn="l"/>
-            <a:r>
-              <a:rPr sz="1200">
-                <a:solidFill>
-                  <a:srgbClr val="2D2D2D"/>
-                </a:solidFill>
-              </a:rPr>
-              <a:t/>
-            </a:r>
+            <a:endParaRPr sz="1200">
+              <a:solidFill>
+                <a:srgbClr val="2D2D2D"/>
+              </a:solidFill>
+            </a:endParaRPr>
           </a:p>
           <a:p>
             <a:pPr algn="l"/>
@@ -10215,6 +10295,7 @@
           <a:lstStyle/>
           <a:p>
             <a:pPr algn="ctr"/>
+            <a:endParaRPr/>
           </a:p>
         </p:txBody>
       </p:sp>
@@ -10258,6 +10339,7 @@
           <a:lstStyle/>
           <a:p>
             <a:pPr algn="ctr"/>
+            <a:endParaRPr/>
           </a:p>
         </p:txBody>
       </p:sp>
@@ -10340,13 +10422,21 @@
           </a:p>
           <a:p>
             <a:pPr algn="l"/>
+            <a:endParaRPr sz="1200">
+              <a:solidFill>
+                <a:srgbClr val="2D2D2D"/>
+              </a:solidFill>
+            </a:endParaRPr>
+          </a:p>
+          <a:p>
+            <a:pPr algn="l"/>
             <a:r>
               <a:rPr sz="1200">
                 <a:solidFill>
                   <a:srgbClr val="2D2D2D"/>
                 </a:solidFill>
               </a:rPr>
-              <a:t/>
+              <a:t>Attribut supplémentaire :</a:t>
             </a:r>
           </a:p>
           <a:p>
@@ -10357,30 +10447,16 @@
                   <a:srgbClr val="2D2D2D"/>
                 </a:solidFill>
               </a:rPr>
-              <a:t>Attribut supplémentaire :</a:t>
-            </a:r>
-          </a:p>
-          <a:p>
-            <a:pPr algn="l"/>
-            <a:r>
-              <a:rPr sz="1200">
-                <a:solidFill>
-                  <a:srgbClr val="2D2D2D"/>
-                </a:solidFill>
-              </a:rPr>
               <a:t>  • typeUrgence (String)  ex: 'Ambulance'</a:t>
             </a:r>
           </a:p>
           <a:p>
             <a:pPr algn="l"/>
-            <a:r>
-              <a:rPr sz="1200">
-                <a:solidFill>
-                  <a:srgbClr val="2D2D2D"/>
-                </a:solidFill>
-              </a:rPr>
-              <a:t/>
-            </a:r>
+            <a:endParaRPr sz="1200">
+              <a:solidFill>
+                <a:srgbClr val="2D2D2D"/>
+              </a:solidFill>
+            </a:endParaRPr>
           </a:p>
           <a:p>
             <a:pPr algn="l"/>
@@ -10524,6 +10600,7 @@
           <a:lstStyle/>
           <a:p>
             <a:pPr algn="ctr"/>
+            <a:endParaRPr/>
           </a:p>
         </p:txBody>
       </p:sp>
@@ -10570,7 +10647,7 @@
 </file>
 
 <file path=ppt/slides/slide7.xml><?xml version="1.0" encoding="utf-8"?>
-<p:sld xmlns:a="http://schemas.openxmlformats.org/drawingml/2006/main" xmlns:p="http://schemas.openxmlformats.org/presentationml/2006/main" xmlns:r="http://schemas.openxmlformats.org/officeDocument/2006/relationships">
+<p:sld xmlns:a="http://schemas.openxmlformats.org/drawingml/2006/main" xmlns:r="http://schemas.openxmlformats.org/officeDocument/2006/relationships" xmlns:p="http://schemas.openxmlformats.org/presentationml/2006/main">
   <p:cSld>
     <p:bg>
       <p:bgPr>
@@ -10586,7 +10663,14 @@
         <p:cNvGrpSpPr/>
         <p:nvPr/>
       </p:nvGrpSpPr>
-      <p:grpSpPr/>
+      <p:grpSpPr>
+        <a:xfrm>
+          <a:off x="0" y="0"/>
+          <a:ext cx="0" cy="0"/>
+          <a:chOff x="0" y="0"/>
+          <a:chExt cx="0" cy="0"/>
+        </a:xfrm>
+      </p:grpSpPr>
       <p:sp>
         <p:nvSpPr>
           <p:cNvPr id="2" name="Rectangle 1"/>
@@ -10627,6 +10711,7 @@
           <a:lstStyle/>
           <a:p>
             <a:pPr algn="ctr"/>
+            <a:endParaRPr/>
           </a:p>
         </p:txBody>
       </p:sp>
@@ -10706,6 +10791,7 @@
           <a:lstStyle/>
           <a:p>
             <a:pPr algn="ctr"/>
+            <a:endParaRPr/>
           </a:p>
         </p:txBody>
       </p:sp>
@@ -10749,6 +10835,7 @@
           <a:lstStyle/>
           <a:p>
             <a:pPr algn="ctr"/>
+            <a:endParaRPr/>
           </a:p>
         </p:txBody>
       </p:sp>
@@ -10895,6 +10982,7 @@
           <a:lstStyle/>
           <a:p>
             <a:pPr algn="ctr"/>
+            <a:endParaRPr/>
           </a:p>
         </p:txBody>
       </p:sp>
@@ -10938,6 +11026,7 @@
           <a:lstStyle/>
           <a:p>
             <a:pPr algn="ctr"/>
+            <a:endParaRPr/>
           </a:p>
         </p:txBody>
       </p:sp>
@@ -11009,14 +11098,11 @@
           </a:p>
           <a:p>
             <a:pPr algn="l"/>
-            <a:r>
-              <a:rPr sz="1200">
-                <a:solidFill>
-                  <a:srgbClr val="2D2D2D"/>
-                </a:solidFill>
-              </a:rPr>
-              <a:t/>
-            </a:r>
+            <a:endParaRPr sz="1200">
+              <a:solidFill>
+                <a:srgbClr val="2D2D2D"/>
+              </a:solidFill>
+            </a:endParaRPr>
           </a:p>
           <a:p>
             <a:pPr algn="l"/>
@@ -11095,6 +11181,7 @@
           <a:lstStyle/>
           <a:p>
             <a:pPr algn="ctr"/>
+            <a:endParaRPr/>
           </a:p>
         </p:txBody>
       </p:sp>
@@ -11138,6 +11225,7 @@
           <a:lstStyle/>
           <a:p>
             <a:pPr algn="ctr"/>
+            <a:endParaRPr/>
           </a:p>
         </p:txBody>
       </p:sp>
@@ -11231,14 +11319,11 @@
           </a:p>
           <a:p>
             <a:pPr algn="l"/>
-            <a:r>
-              <a:rPr sz="1200">
-                <a:solidFill>
-                  <a:srgbClr val="2D2D2D"/>
-                </a:solidFill>
-              </a:rPr>
-              <a:t/>
-            </a:r>
+            <a:endParaRPr sz="1200">
+              <a:solidFill>
+                <a:srgbClr val="2D2D2D"/>
+              </a:solidFill>
+            </a:endParaRPr>
           </a:p>
           <a:p>
             <a:pPr algn="l"/>
@@ -11295,6 +11380,7 @@
           <a:lstStyle/>
           <a:p>
             <a:pPr algn="ctr"/>
+            <a:endParaRPr/>
           </a:p>
         </p:txBody>
       </p:sp>
@@ -11338,6 +11424,7 @@
           <a:lstStyle/>
           <a:p>
             <a:pPr algn="ctr"/>
+            <a:endParaRPr/>
           </a:p>
         </p:txBody>
       </p:sp>
@@ -11409,14 +11496,11 @@
           </a:p>
           <a:p>
             <a:pPr algn="l"/>
-            <a:r>
-              <a:rPr sz="1200">
-                <a:solidFill>
-                  <a:srgbClr val="2D2D2D"/>
-                </a:solidFill>
-              </a:rPr>
-              <a:t/>
-            </a:r>
+            <a:endParaRPr sz="1200">
+              <a:solidFill>
+                <a:srgbClr val="2D2D2D"/>
+              </a:solidFill>
+            </a:endParaRPr>
           </a:p>
           <a:p>
             <a:pPr algn="l"/>
@@ -11484,6 +11568,7 @@
           <a:lstStyle/>
           <a:p>
             <a:pPr algn="ctr"/>
+            <a:endParaRPr/>
           </a:p>
         </p:txBody>
       </p:sp>
@@ -11527,6 +11612,7 @@
           <a:lstStyle/>
           <a:p>
             <a:pPr algn="ctr"/>
+            <a:endParaRPr/>
           </a:p>
         </p:txBody>
       </p:sp>
@@ -11598,14 +11684,11 @@
           </a:p>
           <a:p>
             <a:pPr algn="l"/>
-            <a:r>
-              <a:rPr sz="1200">
-                <a:solidFill>
-                  <a:srgbClr val="2D2D2D"/>
-                </a:solidFill>
-              </a:rPr>
-              <a:t/>
-            </a:r>
+            <a:endParaRPr sz="1200">
+              <a:solidFill>
+                <a:srgbClr val="2D2D2D"/>
+              </a:solidFill>
+            </a:endParaRPr>
           </a:p>
           <a:p>
             <a:pPr algn="l"/>
@@ -11671,6 +11754,7 @@
           <a:lstStyle/>
           <a:p>
             <a:pPr algn="ctr"/>
+            <a:endParaRPr/>
           </a:p>
         </p:txBody>
       </p:sp>
@@ -11717,7 +11801,7 @@
 </file>
 
 <file path=ppt/slides/slide8.xml><?xml version="1.0" encoding="utf-8"?>
-<p:sld xmlns:a="http://schemas.openxmlformats.org/drawingml/2006/main" xmlns:p="http://schemas.openxmlformats.org/presentationml/2006/main" xmlns:r="http://schemas.openxmlformats.org/officeDocument/2006/relationships">
+<p:sld xmlns:a="http://schemas.openxmlformats.org/drawingml/2006/main" xmlns:r="http://schemas.openxmlformats.org/officeDocument/2006/relationships" xmlns:p="http://schemas.openxmlformats.org/presentationml/2006/main">
   <p:cSld>
     <p:bg>
       <p:bgPr>
@@ -11733,7 +11817,14 @@
         <p:cNvGrpSpPr/>
         <p:nvPr/>
       </p:nvGrpSpPr>
-      <p:grpSpPr/>
+      <p:grpSpPr>
+        <a:xfrm>
+          <a:off x="0" y="0"/>
+          <a:ext cx="0" cy="0"/>
+          <a:chOff x="0" y="0"/>
+          <a:chExt cx="0" cy="0"/>
+        </a:xfrm>
+      </p:grpSpPr>
       <p:sp>
         <p:nvSpPr>
           <p:cNvPr id="2" name="Rectangle 1"/>
@@ -11774,6 +11865,7 @@
           <a:lstStyle/>
           <a:p>
             <a:pPr algn="ctr"/>
+            <a:endParaRPr/>
           </a:p>
         </p:txBody>
       </p:sp>
@@ -11853,6 +11945,7 @@
           <a:lstStyle/>
           <a:p>
             <a:pPr algn="ctr"/>
+            <a:endParaRPr/>
           </a:p>
         </p:txBody>
       </p:sp>
@@ -11896,6 +11989,7 @@
           <a:lstStyle/>
           <a:p>
             <a:pPr algn="ctr"/>
+            <a:endParaRPr/>
           </a:p>
         </p:txBody>
       </p:sp>
@@ -12108,6 +12202,7 @@
           <a:lstStyle/>
           <a:p>
             <a:pPr algn="ctr"/>
+            <a:endParaRPr/>
           </a:p>
         </p:txBody>
       </p:sp>
@@ -12151,6 +12246,7 @@
           <a:lstStyle/>
           <a:p>
             <a:pPr algn="ctr"/>
+            <a:endParaRPr/>
           </a:p>
         </p:txBody>
       </p:sp>
@@ -12341,6 +12437,7 @@
           <a:lstStyle/>
           <a:p>
             <a:pPr algn="ctr"/>
+            <a:endParaRPr/>
           </a:p>
         </p:txBody>
       </p:sp>
@@ -12384,6 +12481,7 @@
           <a:lstStyle/>
           <a:p>
             <a:pPr algn="ctr"/>
+            <a:endParaRPr/>
           </a:p>
         </p:txBody>
       </p:sp>
@@ -12510,14 +12608,11 @@
           </a:p>
           <a:p>
             <a:pPr algn="l"/>
-            <a:r>
-              <a:rPr sz="1200">
-                <a:solidFill>
-                  <a:srgbClr val="2D2D2D"/>
-                </a:solidFill>
-              </a:rPr>
-              <a:t/>
-            </a:r>
+            <a:endParaRPr sz="1200">
+              <a:solidFill>
+                <a:srgbClr val="2D2D2D"/>
+              </a:solidFill>
+            </a:endParaRPr>
           </a:p>
           <a:p>
             <a:pPr algn="l"/>
@@ -12572,6 +12667,7 @@
           <a:lstStyle/>
           <a:p>
             <a:pPr algn="ctr"/>
+            <a:endParaRPr/>
           </a:p>
         </p:txBody>
       </p:sp>
@@ -12618,7 +12714,7 @@
 </file>
 
 <file path=ppt/slides/slide9.xml><?xml version="1.0" encoding="utf-8"?>
-<p:sld xmlns:a="http://schemas.openxmlformats.org/drawingml/2006/main" xmlns:p="http://schemas.openxmlformats.org/presentationml/2006/main" xmlns:r="http://schemas.openxmlformats.org/officeDocument/2006/relationships">
+<p:sld xmlns:a="http://schemas.openxmlformats.org/drawingml/2006/main" xmlns:r="http://schemas.openxmlformats.org/officeDocument/2006/relationships" xmlns:p="http://schemas.openxmlformats.org/presentationml/2006/main">
   <p:cSld>
     <p:bg>
       <p:bgPr>
@@ -12634,7 +12730,14 @@
         <p:cNvGrpSpPr/>
         <p:nvPr/>
       </p:nvGrpSpPr>
-      <p:grpSpPr/>
+      <p:grpSpPr>
+        <a:xfrm>
+          <a:off x="0" y="0"/>
+          <a:ext cx="0" cy="0"/>
+          <a:chOff x="0" y="0"/>
+          <a:chExt cx="0" cy="0"/>
+        </a:xfrm>
+      </p:grpSpPr>
       <p:sp>
         <p:nvSpPr>
           <p:cNvPr id="2" name="Rectangle 1"/>
@@ -12675,6 +12778,7 @@
           <a:lstStyle/>
           <a:p>
             <a:pPr algn="ctr"/>
+            <a:endParaRPr/>
           </a:p>
         </p:txBody>
       </p:sp>
@@ -12721,7 +12825,7 @@
         <p:spPr>
           <a:xfrm>
             <a:off x="365760" y="1280160"/>
-            <a:ext cx="9144000" cy="365760"/>
+            <a:ext cx="9144000" cy="338554"/>
           </a:xfrm>
           <a:prstGeom prst="rect">
             <a:avLst/>
@@ -12736,12 +12840,44 @@
           <a:p>
             <a:pPr algn="l"/>
             <a:r>
-              <a:rPr sz="1600" b="1" i="0">
+              <a:rPr sz="1600" b="1" i="0" dirty="0">
                 <a:solidFill>
                   <a:srgbClr val="205C9E"/>
                 </a:solidFill>
               </a:rPr>
-              <a:t>Structure du fichier flotte.csv</a:t>
+              <a:t>Structure du </a:t>
+            </a:r>
+            <a:r>
+              <a:rPr sz="1600" b="1" i="0" dirty="0" err="1">
+                <a:solidFill>
+                  <a:srgbClr val="205C9E"/>
+                </a:solidFill>
+              </a:rPr>
+              <a:t>fichier</a:t>
+            </a:r>
+            <a:r>
+              <a:rPr sz="1600" b="1" i="0" dirty="0">
+                <a:solidFill>
+                  <a:srgbClr val="205C9E"/>
+                </a:solidFill>
+              </a:rPr>
+              <a:t> </a:t>
+            </a:r>
+            <a:r>
+              <a:rPr lang="fr-FR" sz="1600" b="1" dirty="0" err="1">
+                <a:solidFill>
+                  <a:srgbClr val="205C9E"/>
+                </a:solidFill>
+              </a:rPr>
+              <a:t>donnees</a:t>
+            </a:r>
+            <a:r>
+              <a:rPr sz="1600" b="1" i="0" dirty="0">
+                <a:solidFill>
+                  <a:srgbClr val="205C9E"/>
+                </a:solidFill>
+              </a:rPr>
+              <a:t>.csv</a:t>
             </a:r>
           </a:p>
         </p:txBody>
@@ -12786,6 +12922,7 @@
           <a:lstStyle/>
           <a:p>
             <a:pPr algn="ctr"/>
+            <a:endParaRPr/>
           </a:p>
         </p:txBody>
       </p:sp>
@@ -12874,6 +13011,7 @@
           <a:lstStyle/>
           <a:p>
             <a:pPr algn="ctr"/>
+            <a:endParaRPr/>
           </a:p>
         </p:txBody>
       </p:sp>
@@ -12917,6 +13055,7 @@
           <a:lstStyle/>
           <a:p>
             <a:pPr algn="ctr"/>
+            <a:endParaRPr/>
           </a:p>
         </p:txBody>
       </p:sp>
@@ -13052,6 +13191,7 @@
           <a:lstStyle/>
           <a:p>
             <a:pPr algn="ctr"/>
+            <a:endParaRPr/>
           </a:p>
         </p:txBody>
       </p:sp>
@@ -13095,6 +13235,7 @@
           <a:lstStyle/>
           <a:p>
             <a:pPr algn="ctr"/>
+            <a:endParaRPr/>
           </a:p>
         </p:txBody>
       </p:sp>
@@ -13239,6 +13380,7 @@
           <a:lstStyle/>
           <a:p>
             <a:pPr algn="ctr"/>
+            <a:endParaRPr/>
           </a:p>
         </p:txBody>
       </p:sp>
